--- a/docs/PRESENTATION.pptx
+++ b/docs/PRESENTATION.pptx
@@ -3795,7 +3795,7 @@
                 <a:ea typeface="Aptos" pitchFamily="34" charset="-122"/>
                 <a:cs typeface="Aptos" pitchFamily="34" charset="-120"/>
               </a:rPr>
-              <a:t>12 / HANDOFF</a:t>
+              <a:t>12 / CONCLUSION</a:t>
             </a:r>
             <a:endParaRPr lang="en-US" sz="900" dirty="0"/>
           </a:p>
@@ -3984,7 +3984,7 @@
                 <a:ea typeface="Aptos" pitchFamily="34" charset="-122"/>
                 <a:cs typeface="Aptos" pitchFamily="34" charset="-120"/>
               </a:rPr>
-              <a:t>SUBMISSION-READY PROOF OF CONCEPT</a:t>
+              <a:t>PROOF OF CONCEPT</a:t>
             </a:r>
             <a:endParaRPr lang="en-US" sz="900" dirty="0"/>
           </a:p>
@@ -4025,7 +4025,7 @@
                 <a:ea typeface="Aptos" pitchFamily="34" charset="-122"/>
                 <a:cs typeface="Aptos" pitchFamily="34" charset="-120"/>
               </a:rPr>
-              <a:t>The full build. Ready to run.</a:t>
+              <a:t>Rehearse the Surge. Improve the Response.</a:t>
             </a:r>
             <a:endParaRPr lang="en-US" sz="3700" dirty="0"/>
           </a:p>
@@ -4181,8 +4181,9 @@
                 <a:latin typeface="Aptos" pitchFamily="34" charset="0"/>
                 <a:ea typeface="Aptos" pitchFamily="34" charset="-122"/>
                 <a:cs typeface="Aptos" pitchFamily="34" charset="-120"/>
-              </a:rPr>
-              <a:t>Double-click HospitalFlow-AI-Standalone.html</a:t>
+                <a:hlinkClick r:id="rId3"/>
+              </a:rPr>
+              <a:t>Launch Application</a:t>
             </a:r>
             <a:endParaRPr lang="en-US" sz="2100" dirty="0"/>
           </a:p>
@@ -4207,13 +4208,10 @@
         </p:spPr>
         <p:txBody>
           <a:bodyPr wrap="square" lIns="0" tIns="0" rIns="0" bIns="0" rtlCol="0" anchor="ctr">
-            <a:normAutofit/>
-          </a:bodyPr>
-          <a:lstStyle/>
-          <a:p>
-            <a:pPr marL="0" indent="0" algn="l">
-              <a:buNone/>
-            </a:pPr>
+            <a:normAutofit fontScale="92500"/>
+          </a:bodyPr>
+          <a:lstStyle/>
+          <a:p>
             <a:r>
               <a:rPr lang="en-US" sz="1300" b="1" dirty="0">
                 <a:solidFill>
@@ -4223,7 +4221,117 @@
                 <a:ea typeface="Aptos" pitchFamily="34" charset="-122"/>
                 <a:cs typeface="Aptos" pitchFamily="34" charset="-120"/>
               </a:rPr>
-              <a:t>TEAM  [ADD NAME]     •     MEMBERS  [ADD]     •     COLLEGE/INCUBATOR  [ADD]</a:t>
+              <a:t>TEAM </a:t>
+            </a:r>
+            <a:r>
+              <a:rPr lang="en-US" sz="1400" b="1" dirty="0" err="1">
+                <a:solidFill>
+                  <a:srgbClr val="5BE0C6"/>
+                </a:solidFill>
+                <a:latin typeface="Aptos" pitchFamily="34" charset="0"/>
+                <a:ea typeface="Aptos" pitchFamily="34" charset="-122"/>
+                <a:cs typeface="Aptos" pitchFamily="34" charset="-120"/>
+              </a:rPr>
+              <a:t>SynapseX</a:t>
+            </a:r>
+            <a:r>
+              <a:rPr lang="en-US" sz="1300" b="1" dirty="0">
+                <a:solidFill>
+                  <a:srgbClr val="5BE0C6"/>
+                </a:solidFill>
+                <a:latin typeface="Aptos" pitchFamily="34" charset="0"/>
+                <a:ea typeface="Aptos" pitchFamily="34" charset="-122"/>
+                <a:cs typeface="Aptos" pitchFamily="34" charset="-120"/>
+              </a:rPr>
+              <a:t>   •     MEMBERS  [</a:t>
+            </a:r>
+            <a:r>
+              <a:rPr lang="en-US" sz="1400" b="1" dirty="0">
+                <a:solidFill>
+                  <a:srgbClr val="5BE0C6"/>
+                </a:solidFill>
+                <a:latin typeface="Aptos" pitchFamily="34" charset="0"/>
+                <a:ea typeface="Aptos" pitchFamily="34" charset="-122"/>
+                <a:cs typeface="Aptos" pitchFamily="34" charset="-120"/>
+              </a:rPr>
+              <a:t>Etcherla Sai Manoj , Parameswara Meena </a:t>
+            </a:r>
+            <a:r>
+              <a:rPr lang="en-US" sz="1400" b="1" dirty="0" err="1">
+                <a:solidFill>
+                  <a:srgbClr val="5BE0C6"/>
+                </a:solidFill>
+                <a:latin typeface="Aptos" pitchFamily="34" charset="0"/>
+                <a:ea typeface="Aptos" pitchFamily="34" charset="-122"/>
+                <a:cs typeface="Aptos" pitchFamily="34" charset="-120"/>
+              </a:rPr>
+              <a:t>Peddakotla</a:t>
+            </a:r>
+            <a:r>
+              <a:rPr lang="en-US" sz="1400" b="1" dirty="0">
+                <a:solidFill>
+                  <a:srgbClr val="5BE0C6"/>
+                </a:solidFill>
+                <a:latin typeface="Aptos" pitchFamily="34" charset="0"/>
+                <a:ea typeface="Aptos" pitchFamily="34" charset="-122"/>
+                <a:cs typeface="Aptos" pitchFamily="34" charset="-120"/>
+              </a:rPr>
+              <a:t> , </a:t>
+            </a:r>
+            <a:r>
+              <a:rPr lang="en-US" sz="1400" b="1" dirty="0" err="1">
+                <a:solidFill>
+                  <a:srgbClr val="5BE0C6"/>
+                </a:solidFill>
+                <a:latin typeface="Aptos" pitchFamily="34" charset="0"/>
+                <a:ea typeface="Aptos" pitchFamily="34" charset="-122"/>
+                <a:cs typeface="Aptos" pitchFamily="34" charset="-120"/>
+              </a:rPr>
+              <a:t>Madhavaneni</a:t>
+            </a:r>
+            <a:r>
+              <a:rPr lang="en-US" sz="1400" b="1" dirty="0">
+                <a:solidFill>
+                  <a:srgbClr val="5BE0C6"/>
+                </a:solidFill>
+                <a:latin typeface="Aptos" pitchFamily="34" charset="0"/>
+                <a:ea typeface="Aptos" pitchFamily="34" charset="-122"/>
+                <a:cs typeface="Aptos" pitchFamily="34" charset="-120"/>
+              </a:rPr>
+              <a:t> Vivek Rao , </a:t>
+            </a:r>
+            <a:r>
+              <a:rPr lang="en-US" sz="1400" b="1" dirty="0" err="1">
+                <a:solidFill>
+                  <a:srgbClr val="5BE0C6"/>
+                </a:solidFill>
+                <a:latin typeface="Aptos" pitchFamily="34" charset="0"/>
+                <a:ea typeface="Aptos" pitchFamily="34" charset="-122"/>
+                <a:cs typeface="Aptos" pitchFamily="34" charset="-120"/>
+              </a:rPr>
+              <a:t>Valivarthi</a:t>
+            </a:r>
+            <a:r>
+              <a:rPr lang="en-US" sz="1400" b="1" dirty="0">
+                <a:solidFill>
+                  <a:srgbClr val="5BE0C6"/>
+                </a:solidFill>
+                <a:latin typeface="Aptos" pitchFamily="34" charset="0"/>
+                <a:ea typeface="Aptos" pitchFamily="34" charset="-122"/>
+                <a:cs typeface="Aptos" pitchFamily="34" charset="-120"/>
+              </a:rPr>
+              <a:t> Bhargava Varma</a:t>
+            </a:r>
+            <a:r>
+              <a:rPr lang="en-US" sz="1300" b="1" dirty="0">
+                <a:solidFill>
+                  <a:srgbClr val="5BE0C6"/>
+                </a:solidFill>
+                <a:latin typeface="Aptos" pitchFamily="34" charset="0"/>
+                <a:ea typeface="Aptos" pitchFamily="34" charset="-122"/>
+                <a:cs typeface="Aptos" pitchFamily="34" charset="-120"/>
+              </a:rPr>
+              <a:t>]   </a:t>
             </a:r>
             <a:endParaRPr lang="en-US" sz="1300" dirty="0"/>
           </a:p>
@@ -4252,9 +4360,6 @@
           </a:bodyPr>
           <a:lstStyle/>
           <a:p>
-            <a:pPr marL="0" indent="0" algn="l">
-              <a:buNone/>
-            </a:pPr>
             <a:r>
               <a:rPr lang="en-US" sz="1200" dirty="0">
                 <a:solidFill>
@@ -4264,7 +4369,77 @@
                 <a:ea typeface="Aptos" pitchFamily="34" charset="-122"/>
                 <a:cs typeface="Aptos" pitchFamily="34" charset="-120"/>
               </a:rPr>
-              <a:t>SOURCE: [ADD PUBLIC GITHUB LINK]      DEMO VIDEO: [ADD UNLISTED YOUTUBE LINK]</a:t>
+              <a:t>SOURCE: [</a:t>
+            </a:r>
+            <a:r>
+              <a:rPr lang="en-US" sz="1200" dirty="0">
+                <a:solidFill>
+                  <a:srgbClr val="A5B8CB"/>
+                </a:solidFill>
+                <a:latin typeface="Aptos" pitchFamily="34" charset="0"/>
+                <a:ea typeface="Aptos" pitchFamily="34" charset="-122"/>
+                <a:cs typeface="Aptos" pitchFamily="34" charset="-120"/>
+                <a:hlinkClick r:id="rId4"/>
+              </a:rPr>
+              <a:t>https://github.com/saimanoj22/hospitalflow-ai</a:t>
+            </a:r>
+            <a:r>
+              <a:rPr lang="en-US" sz="1200" dirty="0">
+                <a:solidFill>
+                  <a:srgbClr val="A5B8CB"/>
+                </a:solidFill>
+                <a:latin typeface="Aptos" pitchFamily="34" charset="0"/>
+                <a:ea typeface="Aptos" pitchFamily="34" charset="-122"/>
+                <a:cs typeface="Aptos" pitchFamily="34" charset="-120"/>
+              </a:rPr>
+              <a:t>]      DEMO VIDEO: [</a:t>
+            </a:r>
+            <a:r>
+              <a:rPr lang="en-US" sz="1200" dirty="0">
+                <a:solidFill>
+                  <a:srgbClr val="A5B8CB"/>
+                </a:solidFill>
+                <a:latin typeface="Aptos" pitchFamily="34" charset="0"/>
+                <a:ea typeface="Aptos" pitchFamily="34" charset="-122"/>
+                <a:cs typeface="Aptos" pitchFamily="34" charset="-120"/>
+                <a:hlinkClick r:id="rId5"/>
+              </a:rPr>
+              <a:t>https://</a:t>
+            </a:r>
+            <a:r>
+              <a:rPr lang="en-US" sz="1200" dirty="0" err="1">
+                <a:solidFill>
+                  <a:srgbClr val="A5B8CB"/>
+                </a:solidFill>
+                <a:latin typeface="Aptos" pitchFamily="34" charset="0"/>
+                <a:ea typeface="Aptos" pitchFamily="34" charset="-122"/>
+                <a:cs typeface="Aptos" pitchFamily="34" charset="-120"/>
+                <a:hlinkClick r:id="rId5"/>
+              </a:rPr>
+              <a:t>youtu.be</a:t>
+            </a:r>
+            <a:r>
+              <a:rPr lang="en-US" sz="1200" dirty="0">
+                <a:solidFill>
+                  <a:srgbClr val="A5B8CB"/>
+                </a:solidFill>
+                <a:latin typeface="Aptos" pitchFamily="34" charset="0"/>
+                <a:ea typeface="Aptos" pitchFamily="34" charset="-122"/>
+                <a:cs typeface="Aptos" pitchFamily="34" charset="-120"/>
+                <a:hlinkClick r:id="rId5"/>
+              </a:rPr>
+              <a:t>/gJRL3qPQtG0</a:t>
+            </a:r>
+            <a:r>
+              <a:rPr lang="en-US" sz="1200" dirty="0">
+                <a:solidFill>
+                  <a:srgbClr val="A5B8CB"/>
+                </a:solidFill>
+                <a:latin typeface="Aptos" pitchFamily="34" charset="0"/>
+                <a:ea typeface="Aptos" pitchFamily="34" charset="-122"/>
+                <a:cs typeface="Aptos" pitchFamily="34" charset="-120"/>
+              </a:rPr>
+              <a:t>]</a:t>
             </a:r>
             <a:endParaRPr lang="en-US" sz="1200" dirty="0"/>
           </a:p>
